--- a/si_mucosa/assets/overview_si_mucosa.pptx
+++ b/si_mucosa/assets/overview_si_mucosa.pptx
@@ -5061,14 +5061,14 @@
           <p:nvPr>
             <p:extLst>
               <p:ext uri="{D42A27DB-BD31-4B8C-83A1-F6EECF244321}">
-                <p14:modId xmlns:p14="http://schemas.microsoft.com/office/powerpoint/2010/main" val="1329543356"/>
+                <p14:modId xmlns:p14="http://schemas.microsoft.com/office/powerpoint/2010/main" val="209909789"/>
               </p:ext>
             </p:extLst>
           </p:nvPr>
         </p:nvGraphicFramePr>
         <p:xfrm>
-          <a:off x="372828" y="2744040"/>
-          <a:ext cx="2971574" cy="2468880"/>
+          <a:off x="372827" y="2744040"/>
+          <a:ext cx="2288311" cy="2405742"/>
         </p:xfrm>
         <a:graphic>
           <a:graphicData uri="http://schemas.openxmlformats.org/drawingml/2006/table">
@@ -5077,7 +5077,7 @@
                 <a:tableStyleId>{073A0DAA-6AF3-43AB-8588-CEC1D06C72B9}</a:tableStyleId>
               </a:tblPr>
               <a:tblGrid>
-                <a:gridCol w="2971574">
+                <a:gridCol w="2288311">
                   <a:extLst>
                     <a:ext uri="{9D8B030D-6E8A-4147-A177-3AD203B41FA5}">
                       <a16:colId xmlns:a16="http://schemas.microsoft.com/office/drawing/2014/main" val="2689303446"/>
@@ -5085,21 +5085,21 @@
                   </a:extLst>
                 </a:gridCol>
               </a:tblGrid>
-              <a:tr h="411480">
+              <a:tr h="347472">
                 <a:tc>
                   <a:txBody>
                     <a:bodyPr/>
                     <a:lstStyle/>
                     <a:p>
                       <a:r>
-                        <a:rPr lang="en-US" sz="1400" b="1" dirty="0">
+                        <a:rPr lang="en-US" sz="1000" b="1" dirty="0">
                           <a:solidFill>
                             <a:schemeClr val="tx1"/>
                           </a:solidFill>
                           <a:latin typeface="Arial" panose="020B0604020202020204" pitchFamily="34" charset="0"/>
                           <a:cs typeface="Arial" panose="020B0604020202020204" pitchFamily="34" charset="0"/>
                         </a:rPr>
-                        <a:t>Sources (from other projects)</a:t>
+                        <a:t>Sources </a:t>
                       </a:r>
                     </a:p>
                   </a:txBody>
@@ -5175,7 +5175,7 @@
                         <a:defRPr/>
                       </a:pPr>
                       <a:r>
-                        <a:rPr lang="en-US" sz="1400" dirty="0">
+                        <a:rPr lang="en-US" sz="1000" dirty="0">
                           <a:solidFill>
                             <a:schemeClr val="tx1"/>
                           </a:solidFill>
@@ -5185,7 +5185,7 @@
                         <a:t>1. </a:t>
                       </a:r>
                       <a:r>
-                        <a:rPr lang="en-US" sz="1400" dirty="0" err="1">
+                        <a:rPr lang="en-US" sz="1000" dirty="0" err="1">
                           <a:solidFill>
                             <a:schemeClr val="tx1"/>
                           </a:solidFill>
@@ -5194,7 +5194,7 @@
                         </a:rPr>
                         <a:t>process_subset</a:t>
                       </a:r>
-                      <a:endParaRPr lang="en-US" sz="1400" dirty="0">
+                      <a:endParaRPr lang="en-US" sz="1000" dirty="0">
                         <a:solidFill>
                           <a:schemeClr val="tx1"/>
                         </a:solidFill>
@@ -5258,7 +5258,7 @@
                     <a:lstStyle/>
                     <a:p>
                       <a:r>
-                        <a:rPr lang="en-US" sz="1400" dirty="0">
+                        <a:rPr lang="en-US" sz="1000" dirty="0">
                           <a:solidFill>
                             <a:schemeClr val="bg1"/>
                           </a:solidFill>
@@ -5324,7 +5324,7 @@
                     <a:lstStyle/>
                     <a:p>
                       <a:r>
-                        <a:rPr lang="en-US" sz="1400" dirty="0">
+                        <a:rPr lang="en-US" sz="1000" dirty="0">
                           <a:solidFill>
                             <a:schemeClr val="bg1"/>
                           </a:solidFill>
@@ -5334,7 +5334,7 @@
                         <a:t>3. fragments/</a:t>
                       </a:r>
                       <a:r>
-                        <a:rPr lang="en-US" sz="1400" dirty="0" err="1">
+                        <a:rPr lang="en-US" sz="1000" dirty="0" err="1">
                           <a:solidFill>
                             <a:schemeClr val="bg1"/>
                           </a:solidFill>
@@ -5343,7 +5343,7 @@
                         </a:rPr>
                         <a:t>validate_fragments</a:t>
                       </a:r>
-                      <a:endParaRPr lang="en-US" sz="1400" dirty="0">
+                      <a:endParaRPr lang="en-US" sz="1000" dirty="0">
                         <a:solidFill>
                           <a:schemeClr val="bg1"/>
                         </a:solidFill>
@@ -5424,7 +5424,7 @@
                         <a:defRPr/>
                       </a:pPr>
                       <a:r>
-                        <a:rPr lang="en-US" sz="1400" dirty="0">
+                        <a:rPr lang="en-US" sz="1000" dirty="0">
                           <a:solidFill>
                             <a:schemeClr val="bg1"/>
                           </a:solidFill>
@@ -5489,7 +5489,7 @@
                     <a:bodyPr/>
                     <a:lstStyle/>
                     <a:p>
-                      <a:endParaRPr lang="en-US" sz="1400" dirty="0">
+                      <a:endParaRPr lang="en-US" sz="1000" dirty="0">
                         <a:latin typeface="Arial" panose="020B0604020202020204" pitchFamily="34" charset="0"/>
                         <a:cs typeface="Arial" panose="020B0604020202020204" pitchFamily="34" charset="0"/>
                       </a:endParaRPr>
@@ -5562,14 +5562,14 @@
           <p:nvPr>
             <p:extLst>
               <p:ext uri="{D42A27DB-BD31-4B8C-83A1-F6EECF244321}">
-                <p14:modId xmlns:p14="http://schemas.microsoft.com/office/powerpoint/2010/main" val="2871504438"/>
+                <p14:modId xmlns:p14="http://schemas.microsoft.com/office/powerpoint/2010/main" val="2714142740"/>
               </p:ext>
             </p:extLst>
           </p:nvPr>
         </p:nvGraphicFramePr>
         <p:xfrm>
           <a:off x="372828" y="127505"/>
-          <a:ext cx="5655143" cy="2294816"/>
+          <a:ext cx="5655143" cy="2090052"/>
         </p:xfrm>
         <a:graphic>
           <a:graphicData uri="http://schemas.openxmlformats.org/drawingml/2006/table">
@@ -5607,7 +5607,7 @@
                   </a:extLst>
                 </a:gridCol>
               </a:tblGrid>
-              <a:tr h="317758">
+              <a:tr h="347472">
                 <a:tc>
                   <a:txBody>
                     <a:bodyPr/>
@@ -5615,7 +5615,7 @@
                     <a:p>
                       <a:pPr algn="ctr"/>
                       <a:r>
-                        <a:rPr lang="en-US" sz="1200" b="1" dirty="0">
+                        <a:rPr lang="en-US" sz="1000" b="1" dirty="0">
                           <a:solidFill>
                             <a:schemeClr val="tx1"/>
                           </a:solidFill>
@@ -5673,7 +5673,7 @@
                     <a:p>
                       <a:pPr algn="ctr"/>
                       <a:r>
-                        <a:rPr lang="en-US" sz="1200" dirty="0">
+                        <a:rPr lang="en-US" sz="1000" dirty="0">
                           <a:solidFill>
                             <a:schemeClr val="tx1"/>
                           </a:solidFill>
@@ -5731,7 +5731,7 @@
                     <a:p>
                       <a:pPr algn="ctr"/>
                       <a:r>
-                        <a:rPr lang="en-US" sz="1200" b="1" dirty="0">
+                        <a:rPr lang="en-US" sz="1000" b="1" dirty="0">
                           <a:solidFill>
                             <a:schemeClr val="tx1"/>
                           </a:solidFill>
@@ -5789,7 +5789,7 @@
                     <a:p>
                       <a:pPr algn="ctr"/>
                       <a:r>
-                        <a:rPr lang="en-US" sz="1200" b="1" dirty="0">
+                        <a:rPr lang="en-US" sz="1000" b="1" dirty="0">
                           <a:solidFill>
                             <a:schemeClr val="tx1"/>
                           </a:solidFill>
@@ -5846,7 +5846,7 @@
                   </a:ext>
                 </a:extLst>
               </a:tr>
-              <a:tr h="337735">
+              <a:tr h="347472">
                 <a:tc>
                   <a:txBody>
                     <a:bodyPr/>
@@ -5854,7 +5854,7 @@
                     <a:p>
                       <a:pPr algn="ctr"/>
                       <a:r>
-                        <a:rPr lang="en-US" sz="1200" dirty="0">
+                        <a:rPr lang="en-US" sz="1000" dirty="0">
                           <a:solidFill>
                             <a:schemeClr val="bg1"/>
                           </a:solidFill>
@@ -5914,7 +5914,7 @@
                     <a:p>
                       <a:pPr algn="ctr"/>
                       <a:r>
-                        <a:rPr lang="en-US" sz="1200" dirty="0" err="1">
+                        <a:rPr lang="en-US" sz="1000" dirty="0" err="1">
                           <a:solidFill>
                             <a:schemeClr val="tx1"/>
                           </a:solidFill>
@@ -5923,7 +5923,7 @@
                         </a:rPr>
                         <a:t>json</a:t>
                       </a:r>
-                      <a:endParaRPr lang="en-US" sz="1200" dirty="0">
+                      <a:endParaRPr lang="en-US" sz="1000" dirty="0">
                         <a:solidFill>
                           <a:schemeClr val="tx1"/>
                         </a:solidFill>
@@ -5981,7 +5981,7 @@
                     <a:p>
                       <a:pPr algn="ctr"/>
                       <a:r>
-                        <a:rPr lang="en-US" sz="1200" dirty="0" err="1">
+                        <a:rPr lang="en-US" sz="1000" dirty="0" err="1">
                           <a:solidFill>
                             <a:schemeClr val="tx1"/>
                           </a:solidFill>
@@ -5990,7 +5990,7 @@
                         </a:rPr>
                         <a:t>fe_si_images</a:t>
                       </a:r>
-                      <a:endParaRPr lang="en-US" sz="1200" dirty="0">
+                      <a:endParaRPr lang="en-US" sz="1000" dirty="0">
                         <a:solidFill>
                           <a:schemeClr val="tx1"/>
                         </a:solidFill>
@@ -6048,7 +6048,7 @@
                     <a:p>
                       <a:pPr algn="ctr"/>
                       <a:r>
-                        <a:rPr lang="en-US" sz="1200" dirty="0" err="1">
+                        <a:rPr lang="en-US" sz="1000" dirty="0" err="1">
                           <a:solidFill>
                             <a:schemeClr val="bg1"/>
                           </a:solidFill>
@@ -6057,7 +6057,7 @@
                         </a:rPr>
                         <a:t>qupath</a:t>
                       </a:r>
-                      <a:endParaRPr lang="en-US" sz="1200" dirty="0">
+                      <a:endParaRPr lang="en-US" sz="1000" dirty="0">
                         <a:solidFill>
                           <a:schemeClr val="bg1"/>
                         </a:solidFill>
@@ -6114,7 +6114,7 @@
                   </a:ext>
                 </a:extLst>
               </a:tr>
-              <a:tr h="369220">
+              <a:tr h="347472">
                 <a:tc>
                   <a:txBody>
                     <a:bodyPr/>
@@ -6122,7 +6122,7 @@
                     <a:p>
                       <a:pPr algn="ctr"/>
                       <a:r>
-                        <a:rPr lang="en-US" sz="1200" dirty="0">
+                        <a:rPr lang="en-US" sz="1000" dirty="0">
                           <a:solidFill>
                             <a:schemeClr val="bg1"/>
                           </a:solidFill>
@@ -6182,7 +6182,7 @@
                     <a:p>
                       <a:pPr algn="ctr"/>
                       <a:r>
-                        <a:rPr lang="en-US" sz="1200" dirty="0" err="1">
+                        <a:rPr lang="en-US" sz="1000" dirty="0" err="1">
                           <a:solidFill>
                             <a:schemeClr val="tx1"/>
                           </a:solidFill>
@@ -6191,7 +6191,7 @@
                         </a:rPr>
                         <a:t>geojson</a:t>
                       </a:r>
-                      <a:endParaRPr lang="en-US" sz="1200" dirty="0">
+                      <a:endParaRPr lang="en-US" sz="1000" dirty="0">
                         <a:solidFill>
                           <a:schemeClr val="tx1"/>
                         </a:solidFill>
@@ -6249,7 +6249,7 @@
                     <a:p>
                       <a:pPr algn="ctr"/>
                       <a:r>
-                        <a:rPr lang="en-US" sz="1200" dirty="0" err="1">
+                        <a:rPr lang="en-US" sz="1000" dirty="0" err="1">
                           <a:solidFill>
                             <a:schemeClr val="tx1"/>
                           </a:solidFill>
@@ -6258,7 +6258,7 @@
                         </a:rPr>
                         <a:t>aiforia</a:t>
                       </a:r>
-                      <a:endParaRPr lang="en-US" sz="1200" dirty="0">
+                      <a:endParaRPr lang="en-US" sz="1000" dirty="0">
                         <a:solidFill>
                           <a:schemeClr val="tx1"/>
                         </a:solidFill>
@@ -6316,7 +6316,7 @@
                     <a:p>
                       <a:pPr algn="ctr"/>
                       <a:r>
-                        <a:rPr lang="en-US" sz="1200" dirty="0" err="1">
+                        <a:rPr lang="en-US" sz="1000" dirty="0" err="1">
                           <a:solidFill>
                             <a:schemeClr val="bg1"/>
                           </a:solidFill>
@@ -6325,7 +6325,7 @@
                         </a:rPr>
                         <a:t>fe_si_models</a:t>
                       </a:r>
-                      <a:endParaRPr lang="en-US" sz="1200" dirty="0">
+                      <a:endParaRPr lang="en-US" sz="1000" dirty="0">
                         <a:solidFill>
                           <a:schemeClr val="bg1"/>
                         </a:solidFill>
@@ -6384,14 +6384,14 @@
                   </a:ext>
                 </a:extLst>
               </a:tr>
-              <a:tr h="400706">
+              <a:tr h="347472">
                 <a:tc>
                   <a:txBody>
                     <a:bodyPr/>
                     <a:lstStyle/>
                     <a:p>
                       <a:pPr algn="ctr"/>
-                      <a:endParaRPr lang="en-US" sz="1200" dirty="0">
+                      <a:endParaRPr lang="en-US" sz="1000" dirty="0">
                         <a:solidFill>
                           <a:schemeClr val="tx1"/>
                         </a:solidFill>
@@ -6447,7 +6447,7 @@
                     <a:p>
                       <a:pPr algn="ctr"/>
                       <a:r>
-                        <a:rPr lang="en-US" sz="1200" dirty="0">
+                        <a:rPr lang="en-US" sz="1000" dirty="0">
                           <a:solidFill>
                             <a:schemeClr val="bg1"/>
                           </a:solidFill>
@@ -6507,7 +6507,7 @@
                     <a:p>
                       <a:pPr algn="ctr"/>
                       <a:r>
-                        <a:rPr lang="en-US" sz="1200" dirty="0" err="1">
+                        <a:rPr lang="en-US" sz="1000" dirty="0" err="1">
                           <a:solidFill>
                             <a:schemeClr val="bg1"/>
                           </a:solidFill>
@@ -6516,7 +6516,7 @@
                         </a:rPr>
                         <a:t>fe_si_models</a:t>
                       </a:r>
-                      <a:endParaRPr lang="en-US" sz="1200" dirty="0">
+                      <a:endParaRPr lang="en-US" sz="1000" dirty="0">
                         <a:solidFill>
                           <a:schemeClr val="bg1"/>
                         </a:solidFill>
@@ -6573,7 +6573,7 @@
                     <a:lstStyle/>
                     <a:p>
                       <a:pPr algn="ctr"/>
-                      <a:endParaRPr lang="en-US" sz="1200" dirty="0">
+                      <a:endParaRPr lang="en-US" sz="1000" dirty="0">
                         <a:solidFill>
                           <a:schemeClr val="bg1"/>
                         </a:solidFill>
@@ -6620,7 +6620,7 @@
                       <a:prstDash val="solid"/>
                     </a:lnBlToTr>
                     <a:solidFill>
-                      <a:schemeClr val="bg2"/>
+                      <a:schemeClr val="bg1"/>
                     </a:solidFill>
                   </a:tcPr>
                 </a:tc>
@@ -6630,14 +6630,14 @@
                   </a:ext>
                 </a:extLst>
               </a:tr>
-              <a:tr h="317758">
+              <a:tr h="347472">
                 <a:tc>
                   <a:txBody>
                     <a:bodyPr/>
                     <a:lstStyle/>
                     <a:p>
                       <a:pPr algn="ctr"/>
-                      <a:endParaRPr lang="en-US" sz="1200" dirty="0">
+                      <a:endParaRPr lang="en-US" sz="1000" dirty="0">
                         <a:solidFill>
                           <a:schemeClr val="tx1"/>
                         </a:solidFill>
@@ -6693,7 +6693,7 @@
                     <a:p>
                       <a:pPr algn="ctr"/>
                       <a:r>
-                        <a:rPr lang="en-US" sz="1200" dirty="0">
+                        <a:rPr lang="en-US" sz="1000" dirty="0">
                           <a:solidFill>
                             <a:schemeClr val="tx1"/>
                           </a:solidFill>
@@ -6755,7 +6755,7 @@
                     <a:lstStyle/>
                     <a:p>
                       <a:pPr algn="ctr"/>
-                      <a:endParaRPr lang="en-US" sz="1200" dirty="0">
+                      <a:endParaRPr lang="en-US" sz="1000" dirty="0">
                         <a:solidFill>
                           <a:schemeClr val="bg1"/>
                         </a:solidFill>
@@ -6802,7 +6802,7 @@
                       <a:prstDash val="solid"/>
                     </a:lnBlToTr>
                     <a:solidFill>
-                      <a:srgbClr val="0070C0"/>
+                      <a:schemeClr val="bg1"/>
                     </a:solidFill>
                   </a:tcPr>
                 </a:tc>
@@ -6812,7 +6812,7 @@
                     <a:lstStyle/>
                     <a:p>
                       <a:pPr algn="ctr"/>
-                      <a:endParaRPr lang="en-US" sz="1200" dirty="0">
+                      <a:endParaRPr lang="en-US" sz="1000" dirty="0">
                         <a:solidFill>
                           <a:schemeClr val="bg1"/>
                         </a:solidFill>
@@ -6859,7 +6859,7 @@
                       <a:prstDash val="solid"/>
                     </a:lnBlToTr>
                     <a:solidFill>
-                      <a:schemeClr val="bg2"/>
+                      <a:schemeClr val="bg1"/>
                     </a:solidFill>
                   </a:tcPr>
                 </a:tc>
@@ -6869,14 +6869,14 @@
                   </a:ext>
                 </a:extLst>
               </a:tr>
-              <a:tr h="317758">
+              <a:tr h="347472">
                 <a:tc>
                   <a:txBody>
                     <a:bodyPr/>
                     <a:lstStyle/>
                     <a:p>
                       <a:pPr algn="ctr"/>
-                      <a:endParaRPr lang="en-US" sz="1200" dirty="0">
+                      <a:endParaRPr lang="en-US" sz="1000" dirty="0">
                         <a:solidFill>
                           <a:schemeClr val="tx1"/>
                         </a:solidFill>
@@ -6932,7 +6932,7 @@
                     <a:p>
                       <a:pPr algn="ctr"/>
                       <a:r>
-                        <a:rPr lang="en-US" sz="1200" dirty="0" err="1">
+                        <a:rPr lang="en-US" sz="1000" dirty="0" err="1">
                           <a:solidFill>
                             <a:schemeClr val="tx1"/>
                           </a:solidFill>
@@ -6941,7 +6941,7 @@
                         </a:rPr>
                         <a:t>png</a:t>
                       </a:r>
-                      <a:endParaRPr lang="en-US" sz="1200" dirty="0">
+                      <a:endParaRPr lang="en-US" sz="1000" dirty="0">
                         <a:solidFill>
                           <a:schemeClr val="tx1"/>
                         </a:solidFill>
@@ -7001,7 +7001,7 @@
                     <a:lstStyle/>
                     <a:p>
                       <a:pPr algn="ctr"/>
-                      <a:endParaRPr lang="en-US" sz="1200" dirty="0">
+                      <a:endParaRPr lang="en-US" sz="1000" dirty="0">
                         <a:solidFill>
                           <a:schemeClr val="bg1"/>
                         </a:solidFill>
@@ -7048,7 +7048,7 @@
                       <a:prstDash val="solid"/>
                     </a:lnBlToTr>
                     <a:solidFill>
-                      <a:srgbClr val="0070C0"/>
+                      <a:schemeClr val="bg1"/>
                     </a:solidFill>
                   </a:tcPr>
                 </a:tc>
@@ -7058,7 +7058,7 @@
                     <a:lstStyle/>
                     <a:p>
                       <a:pPr algn="ctr"/>
-                      <a:endParaRPr lang="en-US" sz="1200" dirty="0">
+                      <a:endParaRPr lang="en-US" sz="1000" dirty="0">
                         <a:solidFill>
                           <a:schemeClr val="bg1"/>
                         </a:solidFill>
@@ -7105,7 +7105,7 @@
                       <a:prstDash val="solid"/>
                     </a:lnBlToTr>
                     <a:solidFill>
-                      <a:schemeClr val="bg2"/>
+                      <a:schemeClr val="bg1"/>
                     </a:solidFill>
                   </a:tcPr>
                 </a:tc>
